--- a/src/lib/report/assets/default/weekly_report_pptx.pptx
+++ b/src/lib/report/assets/default/weekly_report_pptx.pptx
@@ -484,38 +484,38 @@
 </file>
 
 <file path=ppt/theme/theme1.xml><?xml version="1.0" encoding="utf-8"?>
-<a:theme xmlns:a="http://schemas.openxmlformats.org/drawingml/2006/main" name="1_Office 테마">
+<a:theme xmlns:a="http://schemas.openxmlformats.org/drawingml/2006/main" name="D-Flow">
   <a:themeElements>
     <a:clrScheme name="D-Flow">
       <a:dk1>
-        <a:srgbClr val="262626"/>
+        <a:srgbClr val="1F2937"/>
       </a:dk1>
       <a:lt1>
         <a:srgbClr val="FFFFFF"/>
       </a:lt1>
       <a:dk2>
-        <a:srgbClr val="334155"/>
+        <a:srgbClr val="243247"/>
       </a:dk2>
       <a:lt2>
-        <a:srgbClr val="B6B6B6"/>
+        <a:srgbClr val="E8EEF5"/>
       </a:lt2>
       <a:accent1>
-        <a:srgbClr val="757575"/>
+        <a:srgbClr val="2563EB"/>
       </a:accent1>
       <a:accent2>
-        <a:srgbClr val="4B6580"/>
+        <a:srgbClr val="0F766E"/>
       </a:accent2>
       <a:accent3>
-        <a:srgbClr val="B7D0D4"/>
+        <a:srgbClr val="D97706"/>
       </a:accent3>
       <a:accent4>
-        <a:srgbClr val="0F766E"/>
+        <a:srgbClr val="7C3AED"/>
       </a:accent4>
       <a:accent5>
-        <a:srgbClr val="D55633"/>
+        <a:srgbClr val="DC2626"/>
       </a:accent5>
       <a:accent6>
-        <a:srgbClr val="E9B86E"/>
+        <a:srgbClr val="64748B"/>
       </a:accent6>
       <a:hlink>
         <a:srgbClr val="0563C1"/>
@@ -526,73 +526,27 @@
     </a:clrScheme>
     <a:fontScheme name="D-Flow">
       <a:majorFont>
-        <a:latin typeface="본고딕 Medium"/>
-        <a:ea typeface="본고딕 Medium"/>
+        <a:latin typeface="Arial"/>
+        <a:ea typeface="맑은 고딕"/>
         <a:cs typeface=""/>
       </a:majorFont>
       <a:minorFont>
-        <a:latin typeface="본고딕 Normal"/>
-        <a:ea typeface="본고딕 Normal"/>
+        <a:latin typeface="Arial"/>
+        <a:ea typeface="맑은 고딕"/>
         <a:cs typeface=""/>
       </a:minorFont>
     </a:fontScheme>
-    <a:fmtScheme name="Office 테마">
+    <a:fmtScheme name="D-Flow">
       <a:fillStyleLst>
         <a:solidFill>
           <a:schemeClr val="phClr"/>
         </a:solidFill>
-        <a:gradFill rotWithShape="1">
-          <a:gsLst>
-            <a:gs pos="0">
-              <a:schemeClr val="phClr">
-                <a:lumMod val="110000"/>
-                <a:satMod val="105000"/>
-                <a:tint val="67000"/>
-              </a:schemeClr>
-            </a:gs>
-            <a:gs pos="50000">
-              <a:schemeClr val="phClr">
-                <a:lumMod val="105000"/>
-                <a:satMod val="103000"/>
-                <a:tint val="73000"/>
-              </a:schemeClr>
-            </a:gs>
-            <a:gs pos="100000">
-              <a:schemeClr val="phClr">
-                <a:lumMod val="105000"/>
-                <a:satMod val="109000"/>
-                <a:tint val="81000"/>
-              </a:schemeClr>
-            </a:gs>
-          </a:gsLst>
-          <a:lin ang="5400000" scaled="0"/>
-        </a:gradFill>
-        <a:gradFill rotWithShape="1">
-          <a:gsLst>
-            <a:gs pos="0">
-              <a:schemeClr val="phClr">
-                <a:satMod val="103000"/>
-                <a:lumMod val="102000"/>
-                <a:tint val="94000"/>
-              </a:schemeClr>
-            </a:gs>
-            <a:gs pos="50000">
-              <a:schemeClr val="phClr">
-                <a:satMod val="110000"/>
-                <a:lumMod val="100000"/>
-                <a:shade val="100000"/>
-              </a:schemeClr>
-            </a:gs>
-            <a:gs pos="100000">
-              <a:schemeClr val="phClr">
-                <a:lumMod val="99000"/>
-                <a:satMod val="120000"/>
-                <a:shade val="78000"/>
-              </a:schemeClr>
-            </a:gs>
-          </a:gsLst>
-          <a:lin ang="5400000" scaled="0"/>
-        </a:gradFill>
+        <a:solidFill>
+          <a:schemeClr val="phClr"/>
+        </a:solidFill>
+        <a:solidFill>
+          <a:schemeClr val="phClr"/>
+        </a:solidFill>
       </a:fillStyleLst>
       <a:lnStyleLst>
         <a:ln w="6350" cap="flat" cmpd="sng" algn="ctr">
@@ -600,21 +554,18 @@
             <a:schemeClr val="phClr"/>
           </a:solidFill>
           <a:prstDash val="solid"/>
-          <a:miter lim="800000"/>
         </a:ln>
         <a:ln w="12700" cap="flat" cmpd="sng" algn="ctr">
           <a:solidFill>
             <a:schemeClr val="phClr"/>
           </a:solidFill>
           <a:prstDash val="solid"/>
-          <a:miter lim="800000"/>
         </a:ln>
         <a:ln w="19050" cap="flat" cmpd="sng" algn="ctr">
           <a:solidFill>
             <a:schemeClr val="phClr"/>
           </a:solidFill>
           <a:prstDash val="solid"/>
-          <a:miter lim="800000"/>
         </a:ln>
       </a:lnStyleLst>
       <a:effectStyleLst>
@@ -625,13 +576,7 @@
           <a:effectLst/>
         </a:effectStyle>
         <a:effectStyle>
-          <a:effectLst>
-            <a:outerShdw blurRad="57150" dist="19050" dir="5400000" algn="ctr" rotWithShape="0">
-              <a:srgbClr val="000000">
-                <a:alpha val="63000"/>
-              </a:srgbClr>
-            </a:outerShdw>
-          </a:effectLst>
+          <a:effectLst/>
         </a:effectStyle>
       </a:effectStyleLst>
       <a:bgFillStyleLst>
@@ -639,47 +584,15 @@
           <a:schemeClr val="phClr"/>
         </a:solidFill>
         <a:solidFill>
-          <a:schemeClr val="phClr">
-            <a:tint val="95000"/>
-            <a:satMod val="170000"/>
-          </a:schemeClr>
-        </a:solidFill>
-        <a:gradFill rotWithShape="1">
-          <a:gsLst>
-            <a:gs pos="0">
-              <a:schemeClr val="phClr">
-                <a:tint val="93000"/>
-                <a:satMod val="150000"/>
-                <a:shade val="98000"/>
-                <a:lumMod val="102000"/>
-              </a:schemeClr>
-            </a:gs>
-            <a:gs pos="50000">
-              <a:schemeClr val="phClr">
-                <a:tint val="98000"/>
-                <a:satMod val="130000"/>
-                <a:shade val="90000"/>
-                <a:lumMod val="103000"/>
-              </a:schemeClr>
-            </a:gs>
-            <a:gs pos="100000">
-              <a:schemeClr val="phClr">
-                <a:shade val="63000"/>
-                <a:satMod val="120000"/>
-              </a:schemeClr>
-            </a:gs>
-          </a:gsLst>
-          <a:lin ang="5400000" scaled="0"/>
-        </a:gradFill>
+          <a:schemeClr val="phClr"/>
+        </a:solidFill>
+        <a:solidFill>
+          <a:schemeClr val="phClr"/>
+        </a:solidFill>
       </a:bgFillStyleLst>
     </a:fmtScheme>
   </a:themeElements>
   <a:objectDefaults/>
   <a:extraClrSchemeLst/>
-  <a:extLst>
-    <a:ext uri="{05A4C25C-085E-4340-85A3-A5531E510DB2}">
-      <thm15:themeFamily xmlns:thm15="http://schemas.microsoft.com/office/thememl/2012/main" name="Office Theme" id="{62F939B6-93AF-4DB8-9C6B-D6C7DFDC589F}" vid="{4A3C46E8-61CC-4603-A589-7422A47A8E4A}"/>
-    </a:ext>
-  </a:extLst>
 </a:theme>
 </file>
--- a/src/lib/report/assets/default/weekly_report_pptx.pptx
+++ b/src/lib/report/assets/default/weekly_report_pptx.pptx
@@ -294,10 +294,9 @@
             <a:tbl>
               <a:tblPr firstRow="1" bandRow="1"/>
               <a:tblGrid>
-                <a:gridCol w="2247900"/>
-                <a:gridCol w="2247900"/>
-                <a:gridCol w="2247900"/>
-                <a:gridCol w="2247900"/>
+                <a:gridCol w="2997200"/>
+                <a:gridCol w="2997200"/>
+                <a:gridCol w="2997200"/>
               </a:tblGrid>
               <a:tr h="411480">
                 <a:tc>
@@ -314,7 +313,7 @@
                           <a:latin typeface="Arial"/>
                           <a:ea typeface="맑은 고딕"/>
                         </a:rPr>
-                        <a:t>구분</a:t>
+                        <a:t>업무영역 · 항목</a:t>
                       </a:r>
                       <a:endParaRPr lang="ko-KR"/>
                     </a:p>
@@ -357,27 +356,6 @@
                           <a:ea typeface="맑은 고딕"/>
                         </a:rPr>
                         <a:t>차주 계획</a:t>
-                      </a:r>
-                      <a:endParaRPr lang="ko-KR"/>
-                    </a:p>
-                  </a:txBody>
-                  <a:tcPr marL="91440" marR="91440" marT="91440" marB="91440"/>
-                </a:tc>
-                <a:tc>
-                  <a:txBody>
-                    <a:bodyPr wrap="square"/>
-                    <a:lstStyle/>
-                    <a:p>
-                      <a:pPr/>
-                      <a:r>
-                        <a:rPr lang="ko-KR" sz="1400">
-                          <a:solidFill>
-                            <a:srgbClr val="243247"/>
-                          </a:solidFill>
-                          <a:latin typeface="Arial"/>
-                          <a:ea typeface="맑은 고딕"/>
-                        </a:rPr>
-                        <a:t>이슈</a:t>
                       </a:r>
                       <a:endParaRPr lang="ko-KR"/>
                     </a:p>
@@ -443,27 +421,6 @@
                           <a:ea typeface="맑은 고딕"/>
                         </a:rPr>
                         <a:t>{{.next_content}}</a:t>
-                      </a:r>
-                      <a:endParaRPr lang="ko-KR"/>
-                    </a:p>
-                  </a:txBody>
-                  <a:tcPr marL="91440" marR="91440" marT="91440" marB="91440"/>
-                </a:tc>
-                <a:tc>
-                  <a:txBody>
-                    <a:bodyPr wrap="square"/>
-                    <a:lstStyle/>
-                    <a:p>
-                      <a:pPr/>
-                      <a:r>
-                        <a:rPr lang="ko-KR" sz="1400">
-                          <a:solidFill>
-                            <a:srgbClr val="243247"/>
-                          </a:solidFill>
-                          <a:latin typeface="Arial"/>
-                          <a:ea typeface="맑은 고딕"/>
-                        </a:rPr>
-                        <a:t>{{.this_issue}}</a:t>
                       </a:r>
                       <a:endParaRPr lang="ko-KR"/>
                     </a:p>
